--- a/docs/pptx/carbo/ritu-carbo-linsubhr-ratio-grade3.pptx
+++ b/docs/pptx/carbo/ritu-carbo-linsubhr-ratio-grade3.pptx
@@ -2443,7 +2443,7 @@
           </p:nvSpPr>
           <p:spPr>
             <a:xfrm>
-              <a:off x="1427870" y="2073503"/>
+              <a:off x="1428538" y="2073503"/>
               <a:ext cx="0" cy="3649639"/>
             </a:xfrm>
             <a:custGeom>
@@ -2486,7 +2486,7 @@
           </p:nvSpPr>
           <p:spPr>
             <a:xfrm>
-              <a:off x="3243537" y="2073503"/>
+              <a:off x="3243764" y="2073503"/>
               <a:ext cx="0" cy="3649639"/>
             </a:xfrm>
             <a:custGeom>
@@ -2529,7 +2529,7 @@
           </p:nvSpPr>
           <p:spPr>
             <a:xfrm>
-              <a:off x="5059204" y="2073503"/>
+              <a:off x="5058989" y="2073503"/>
               <a:ext cx="0" cy="3649639"/>
             </a:xfrm>
             <a:custGeom>
@@ -2572,7 +2572,7 @@
           </p:nvSpPr>
           <p:spPr>
             <a:xfrm>
-              <a:off x="6874870" y="2073503"/>
+              <a:off x="6874214" y="2073503"/>
               <a:ext cx="0" cy="3649639"/>
             </a:xfrm>
             <a:custGeom>
@@ -2830,7 +2830,7 @@
           </p:nvSpPr>
           <p:spPr>
             <a:xfrm>
-              <a:off x="2335703" y="2073503"/>
+              <a:off x="2336151" y="2073503"/>
               <a:ext cx="0" cy="3649639"/>
             </a:xfrm>
             <a:custGeom>
@@ -2873,7 +2873,7 @@
           </p:nvSpPr>
           <p:spPr>
             <a:xfrm>
-              <a:off x="4151370" y="2073503"/>
+              <a:off x="4151376" y="2073503"/>
               <a:ext cx="0" cy="3649639"/>
             </a:xfrm>
             <a:custGeom>
@@ -2916,7 +2916,7 @@
           </p:nvSpPr>
           <p:spPr>
             <a:xfrm>
-              <a:off x="5967037" y="2073503"/>
+              <a:off x="5966601" y="2073503"/>
               <a:ext cx="0" cy="3649639"/>
             </a:xfrm>
             <a:custGeom>
@@ -2959,7 +2959,7 @@
           </p:nvSpPr>
           <p:spPr>
             <a:xfrm>
-              <a:off x="7782704" y="2073503"/>
+              <a:off x="7781826" y="2073503"/>
               <a:ext cx="0" cy="3649639"/>
             </a:xfrm>
             <a:custGeom>
@@ -3003,518 +3003,518 @@
           <p:spPr>
             <a:xfrm>
               <a:off x="1172049" y="2073503"/>
-              <a:ext cx="7090630" cy="3482743"/>
+              <a:ext cx="7090630" cy="3482820"/>
             </a:xfrm>
             <a:custGeom>
               <a:avLst/>
               <a:pathLst>
-                <a:path w="7090630" h="3482743">
+                <a:path w="7090630" h="3482820">
                   <a:moveTo>
-                    <a:pt x="2226313" y="0"/>
+                    <a:pt x="2266504" y="0"/>
                   </a:moveTo>
                   <a:lnTo>
-                    <a:pt x="2291920" y="364399"/>
-                  </a:lnTo>
-                  <a:lnTo>
-                    <a:pt x="2363543" y="717214"/>
-                  </a:lnTo>
-                  <a:lnTo>
-                    <a:pt x="2435165" y="1030124"/>
-                  </a:lnTo>
-                  <a:lnTo>
-                    <a:pt x="2506788" y="1307641"/>
-                  </a:lnTo>
-                  <a:lnTo>
-                    <a:pt x="2578410" y="1553770"/>
-                  </a:lnTo>
-                  <a:lnTo>
-                    <a:pt x="2650033" y="1772061"/>
-                  </a:lnTo>
-                  <a:lnTo>
-                    <a:pt x="2721655" y="1965662"/>
-                  </a:lnTo>
-                  <a:lnTo>
-                    <a:pt x="2793278" y="2137365"/>
-                  </a:lnTo>
-                  <a:lnTo>
-                    <a:pt x="2864901" y="2289648"/>
-                  </a:lnTo>
-                  <a:lnTo>
-                    <a:pt x="2936523" y="2424707"/>
-                  </a:lnTo>
-                  <a:lnTo>
-                    <a:pt x="3008146" y="2544490"/>
-                  </a:lnTo>
-                  <a:lnTo>
-                    <a:pt x="3079768" y="2650725"/>
-                  </a:lnTo>
-                  <a:lnTo>
-                    <a:pt x="3151391" y="2676759"/>
-                  </a:lnTo>
-                  <a:lnTo>
-                    <a:pt x="3223013" y="2699422"/>
-                  </a:lnTo>
-                  <a:lnTo>
-                    <a:pt x="3294636" y="2721450"/>
-                  </a:lnTo>
-                  <a:lnTo>
-                    <a:pt x="3366258" y="2742858"/>
-                  </a:lnTo>
-                  <a:lnTo>
-                    <a:pt x="3437881" y="2763666"/>
-                  </a:lnTo>
-                  <a:lnTo>
-                    <a:pt x="3509503" y="2783889"/>
-                  </a:lnTo>
-                  <a:lnTo>
-                    <a:pt x="3581126" y="2803544"/>
-                  </a:lnTo>
-                  <a:lnTo>
-                    <a:pt x="3652748" y="2822647"/>
-                  </a:lnTo>
-                  <a:lnTo>
-                    <a:pt x="3724371" y="2841214"/>
-                  </a:lnTo>
-                  <a:lnTo>
-                    <a:pt x="3795993" y="2859259"/>
-                  </a:lnTo>
-                  <a:lnTo>
-                    <a:pt x="3867616" y="2876797"/>
-                  </a:lnTo>
-                  <a:lnTo>
-                    <a:pt x="3939238" y="2893843"/>
-                  </a:lnTo>
-                  <a:lnTo>
-                    <a:pt x="4010861" y="2910410"/>
-                  </a:lnTo>
-                  <a:lnTo>
-                    <a:pt x="4082483" y="2926512"/>
-                  </a:lnTo>
-                  <a:lnTo>
-                    <a:pt x="4154106" y="2942162"/>
-                  </a:lnTo>
-                  <a:lnTo>
-                    <a:pt x="4225729" y="2957372"/>
-                  </a:lnTo>
-                  <a:lnTo>
-                    <a:pt x="4297351" y="2972155"/>
-                  </a:lnTo>
-                  <a:lnTo>
-                    <a:pt x="4368974" y="2986523"/>
-                  </a:lnTo>
-                  <a:lnTo>
-                    <a:pt x="4440596" y="3000487"/>
-                  </a:lnTo>
-                  <a:lnTo>
-                    <a:pt x="4512219" y="3014059"/>
-                  </a:lnTo>
-                  <a:lnTo>
-                    <a:pt x="4583841" y="3027250"/>
-                  </a:lnTo>
-                  <a:lnTo>
-                    <a:pt x="4655464" y="3040070"/>
-                  </a:lnTo>
-                  <a:lnTo>
-                    <a:pt x="4727086" y="3052531"/>
-                  </a:lnTo>
-                  <a:lnTo>
-                    <a:pt x="4798709" y="3064641"/>
-                  </a:lnTo>
-                  <a:lnTo>
-                    <a:pt x="4870331" y="3076412"/>
-                  </a:lnTo>
-                  <a:lnTo>
-                    <a:pt x="4941954" y="3087851"/>
-                  </a:lnTo>
-                  <a:lnTo>
-                    <a:pt x="5013576" y="3098970"/>
-                  </a:lnTo>
-                  <a:lnTo>
-                    <a:pt x="5085199" y="3109776"/>
-                  </a:lnTo>
-                  <a:lnTo>
-                    <a:pt x="5156821" y="3120279"/>
-                  </a:lnTo>
-                  <a:lnTo>
-                    <a:pt x="5228444" y="3130487"/>
-                  </a:lnTo>
-                  <a:lnTo>
-                    <a:pt x="5300066" y="3140408"/>
-                  </a:lnTo>
-                  <a:lnTo>
-                    <a:pt x="5371689" y="3150050"/>
-                  </a:lnTo>
-                  <a:lnTo>
-                    <a:pt x="5443311" y="3159422"/>
-                  </a:lnTo>
-                  <a:lnTo>
-                    <a:pt x="5514934" y="3168531"/>
-                  </a:lnTo>
-                  <a:lnTo>
-                    <a:pt x="5586557" y="3177383"/>
-                  </a:lnTo>
-                  <a:lnTo>
-                    <a:pt x="5658179" y="3185987"/>
-                  </a:lnTo>
-                  <a:lnTo>
-                    <a:pt x="5729802" y="3194350"/>
-                  </a:lnTo>
-                  <a:lnTo>
-                    <a:pt x="5801424" y="3202477"/>
-                  </a:lnTo>
-                  <a:lnTo>
-                    <a:pt x="5873047" y="3210377"/>
-                  </a:lnTo>
-                  <a:lnTo>
-                    <a:pt x="5944669" y="3218054"/>
-                  </a:lnTo>
-                  <a:lnTo>
-                    <a:pt x="6016292" y="3225516"/>
-                  </a:lnTo>
-                  <a:lnTo>
-                    <a:pt x="6087914" y="3232768"/>
-                  </a:lnTo>
-                  <a:lnTo>
-                    <a:pt x="6159537" y="3239817"/>
-                  </a:lnTo>
-                  <a:lnTo>
-                    <a:pt x="6231159" y="3246667"/>
-                  </a:lnTo>
-                  <a:lnTo>
-                    <a:pt x="6302782" y="3253326"/>
-                  </a:lnTo>
-                  <a:lnTo>
-                    <a:pt x="6374404" y="3259797"/>
-                  </a:lnTo>
-                  <a:lnTo>
-                    <a:pt x="6446027" y="3266086"/>
-                  </a:lnTo>
-                  <a:lnTo>
-                    <a:pt x="6517649" y="3272199"/>
-                  </a:lnTo>
-                  <a:lnTo>
-                    <a:pt x="6589272" y="3278140"/>
-                  </a:lnTo>
-                  <a:lnTo>
-                    <a:pt x="6660894" y="3283915"/>
-                  </a:lnTo>
-                  <a:lnTo>
-                    <a:pt x="6732517" y="3289527"/>
-                  </a:lnTo>
-                  <a:lnTo>
-                    <a:pt x="6804139" y="3294981"/>
-                  </a:lnTo>
-                  <a:lnTo>
-                    <a:pt x="6875762" y="3300283"/>
-                  </a:lnTo>
-                  <a:lnTo>
-                    <a:pt x="6947385" y="3305435"/>
-                  </a:lnTo>
-                  <a:lnTo>
-                    <a:pt x="7019007" y="3310443"/>
-                  </a:lnTo>
-                  <a:lnTo>
-                    <a:pt x="7090630" y="3315310"/>
-                  </a:lnTo>
-                  <a:lnTo>
-                    <a:pt x="7090630" y="3482743"/>
-                  </a:lnTo>
-                  <a:lnTo>
-                    <a:pt x="7019007" y="3482615"/>
-                  </a:lnTo>
-                  <a:lnTo>
-                    <a:pt x="6947385" y="3482471"/>
-                  </a:lnTo>
-                  <a:lnTo>
-                    <a:pt x="6875762" y="3482308"/>
-                  </a:lnTo>
-                  <a:lnTo>
-                    <a:pt x="6804139" y="3482125"/>
-                  </a:lnTo>
-                  <a:lnTo>
-                    <a:pt x="6732517" y="3481918"/>
-                  </a:lnTo>
-                  <a:lnTo>
-                    <a:pt x="6660894" y="3481685"/>
-                  </a:lnTo>
-                  <a:lnTo>
-                    <a:pt x="6589272" y="3481422"/>
-                  </a:lnTo>
-                  <a:lnTo>
-                    <a:pt x="6517649" y="3481125"/>
-                  </a:lnTo>
-                  <a:lnTo>
-                    <a:pt x="6446027" y="3480791"/>
-                  </a:lnTo>
-                  <a:lnTo>
-                    <a:pt x="6374404" y="3480414"/>
-                  </a:lnTo>
-                  <a:lnTo>
-                    <a:pt x="6302782" y="3479989"/>
-                  </a:lnTo>
-                  <a:lnTo>
-                    <a:pt x="6231159" y="3479510"/>
-                  </a:lnTo>
-                  <a:lnTo>
-                    <a:pt x="6159537" y="3478969"/>
-                  </a:lnTo>
-                  <a:lnTo>
-                    <a:pt x="6087914" y="3478360"/>
-                  </a:lnTo>
-                  <a:lnTo>
-                    <a:pt x="6016292" y="3477673"/>
-                  </a:lnTo>
-                  <a:lnTo>
-                    <a:pt x="5944669" y="3476899"/>
-                  </a:lnTo>
-                  <a:lnTo>
-                    <a:pt x="5873047" y="3476026"/>
-                  </a:lnTo>
-                  <a:lnTo>
-                    <a:pt x="5801424" y="3475041"/>
-                  </a:lnTo>
-                  <a:lnTo>
-                    <a:pt x="5729802" y="3473931"/>
-                  </a:lnTo>
-                  <a:lnTo>
-                    <a:pt x="5658179" y="3472679"/>
-                  </a:lnTo>
-                  <a:lnTo>
-                    <a:pt x="5586557" y="3471267"/>
-                  </a:lnTo>
-                  <a:lnTo>
-                    <a:pt x="5514934" y="3469676"/>
-                  </a:lnTo>
-                  <a:lnTo>
-                    <a:pt x="5443311" y="3467882"/>
-                  </a:lnTo>
-                  <a:lnTo>
-                    <a:pt x="5371689" y="3465858"/>
-                  </a:lnTo>
-                  <a:lnTo>
-                    <a:pt x="5300066" y="3463577"/>
-                  </a:lnTo>
-                  <a:lnTo>
-                    <a:pt x="5228444" y="3461005"/>
-                  </a:lnTo>
-                  <a:lnTo>
-                    <a:pt x="5156821" y="3458105"/>
-                  </a:lnTo>
-                  <a:lnTo>
-                    <a:pt x="5085199" y="3454835"/>
-                  </a:lnTo>
-                  <a:lnTo>
-                    <a:pt x="5013576" y="3451148"/>
-                  </a:lnTo>
-                  <a:lnTo>
-                    <a:pt x="4941954" y="3446990"/>
-                  </a:lnTo>
-                  <a:lnTo>
-                    <a:pt x="4870331" y="3442303"/>
-                  </a:lnTo>
-                  <a:lnTo>
-                    <a:pt x="4798709" y="3437017"/>
-                  </a:lnTo>
-                  <a:lnTo>
-                    <a:pt x="4727086" y="3431058"/>
-                  </a:lnTo>
-                  <a:lnTo>
-                    <a:pt x="4655464" y="3424339"/>
-                  </a:lnTo>
-                  <a:lnTo>
-                    <a:pt x="4583841" y="3416763"/>
-                  </a:lnTo>
-                  <a:lnTo>
-                    <a:pt x="4512219" y="3408220"/>
-                  </a:lnTo>
-                  <a:lnTo>
-                    <a:pt x="4440596" y="3398588"/>
-                  </a:lnTo>
-                  <a:lnTo>
-                    <a:pt x="4368974" y="3387728"/>
-                  </a:lnTo>
-                  <a:lnTo>
-                    <a:pt x="4297351" y="3375483"/>
-                  </a:lnTo>
-                  <a:lnTo>
-                    <a:pt x="4225729" y="3361676"/>
-                  </a:lnTo>
-                  <a:lnTo>
-                    <a:pt x="4154106" y="3346109"/>
-                  </a:lnTo>
-                  <a:lnTo>
-                    <a:pt x="4082483" y="3328556"/>
-                  </a:lnTo>
-                  <a:lnTo>
-                    <a:pt x="4010861" y="3308765"/>
-                  </a:lnTo>
-                  <a:lnTo>
-                    <a:pt x="3939238" y="3286449"/>
-                  </a:lnTo>
-                  <a:lnTo>
-                    <a:pt x="3867616" y="3261288"/>
-                  </a:lnTo>
-                  <a:lnTo>
-                    <a:pt x="3795993" y="3232918"/>
-                  </a:lnTo>
-                  <a:lnTo>
-                    <a:pt x="3724371" y="3200930"/>
-                  </a:lnTo>
-                  <a:lnTo>
-                    <a:pt x="3652748" y="3164862"/>
-                  </a:lnTo>
-                  <a:lnTo>
-                    <a:pt x="3581126" y="3124195"/>
-                  </a:lnTo>
-                  <a:lnTo>
-                    <a:pt x="3509503" y="3078342"/>
-                  </a:lnTo>
-                  <a:lnTo>
-                    <a:pt x="3437881" y="3026641"/>
-                  </a:lnTo>
-                  <a:lnTo>
-                    <a:pt x="3366258" y="2968346"/>
-                  </a:lnTo>
-                  <a:lnTo>
-                    <a:pt x="3294636" y="2902618"/>
-                  </a:lnTo>
-                  <a:lnTo>
-                    <a:pt x="3223013" y="2828506"/>
-                  </a:lnTo>
-                  <a:lnTo>
-                    <a:pt x="3151391" y="2744944"/>
-                  </a:lnTo>
-                  <a:lnTo>
-                    <a:pt x="3079768" y="2653440"/>
-                  </a:lnTo>
-                  <a:lnTo>
-                    <a:pt x="3008146" y="2629447"/>
-                  </a:lnTo>
-                  <a:lnTo>
-                    <a:pt x="2936523" y="2604761"/>
-                  </a:lnTo>
-                  <a:lnTo>
-                    <a:pt x="2864901" y="2579362"/>
-                  </a:lnTo>
-                  <a:lnTo>
-                    <a:pt x="2793278" y="2553229"/>
-                  </a:lnTo>
-                  <a:lnTo>
-                    <a:pt x="2721655" y="2526341"/>
-                  </a:lnTo>
-                  <a:lnTo>
-                    <a:pt x="2650033" y="2498676"/>
-                  </a:lnTo>
-                  <a:lnTo>
-                    <a:pt x="2578410" y="2470211"/>
-                  </a:lnTo>
-                  <a:lnTo>
-                    <a:pt x="2506788" y="2440924"/>
-                  </a:lnTo>
-                  <a:lnTo>
-                    <a:pt x="2435165" y="2410791"/>
-                  </a:lnTo>
-                  <a:lnTo>
-                    <a:pt x="2363543" y="2379786"/>
-                  </a:lnTo>
-                  <a:lnTo>
-                    <a:pt x="2291920" y="2347886"/>
-                  </a:lnTo>
-                  <a:lnTo>
-                    <a:pt x="2220298" y="2315065"/>
-                  </a:lnTo>
-                  <a:lnTo>
-                    <a:pt x="2148675" y="2281294"/>
-                  </a:lnTo>
-                  <a:lnTo>
-                    <a:pt x="2077053" y="2246548"/>
-                  </a:lnTo>
-                  <a:lnTo>
-                    <a:pt x="2005430" y="2210798"/>
-                  </a:lnTo>
-                  <a:lnTo>
-                    <a:pt x="1933808" y="2174015"/>
-                  </a:lnTo>
-                  <a:lnTo>
-                    <a:pt x="1862185" y="2136169"/>
-                  </a:lnTo>
-                  <a:lnTo>
-                    <a:pt x="1790563" y="2097229"/>
-                  </a:lnTo>
-                  <a:lnTo>
-                    <a:pt x="1718940" y="2057165"/>
-                  </a:lnTo>
-                  <a:lnTo>
-                    <a:pt x="1647318" y="2015942"/>
-                  </a:lnTo>
-                  <a:lnTo>
-                    <a:pt x="1575695" y="1973528"/>
-                  </a:lnTo>
-                  <a:lnTo>
-                    <a:pt x="1504073" y="1929889"/>
-                  </a:lnTo>
-                  <a:lnTo>
-                    <a:pt x="1432450" y="1884989"/>
-                  </a:lnTo>
-                  <a:lnTo>
-                    <a:pt x="1360827" y="1838791"/>
-                  </a:lnTo>
-                  <a:lnTo>
-                    <a:pt x="1289205" y="1791258"/>
-                  </a:lnTo>
-                  <a:lnTo>
-                    <a:pt x="1217582" y="1742352"/>
-                  </a:lnTo>
-                  <a:lnTo>
-                    <a:pt x="1145960" y="1692033"/>
-                  </a:lnTo>
-                  <a:lnTo>
-                    <a:pt x="1074337" y="1640260"/>
-                  </a:lnTo>
-                  <a:lnTo>
-                    <a:pt x="1002715" y="1586990"/>
-                  </a:lnTo>
-                  <a:lnTo>
-                    <a:pt x="931092" y="1532181"/>
-                  </a:lnTo>
-                  <a:lnTo>
-                    <a:pt x="859470" y="1475789"/>
-                  </a:lnTo>
-                  <a:lnTo>
-                    <a:pt x="787847" y="1417767"/>
-                  </a:lnTo>
-                  <a:lnTo>
-                    <a:pt x="716225" y="1358068"/>
-                  </a:lnTo>
-                  <a:lnTo>
-                    <a:pt x="644602" y="1296645"/>
-                  </a:lnTo>
-                  <a:lnTo>
-                    <a:pt x="572980" y="1233446"/>
-                  </a:lnTo>
-                  <a:lnTo>
-                    <a:pt x="501357" y="1168422"/>
-                  </a:lnTo>
-                  <a:lnTo>
-                    <a:pt x="429735" y="1101518"/>
-                  </a:lnTo>
-                  <a:lnTo>
-                    <a:pt x="358112" y="1032681"/>
-                  </a:lnTo>
-                  <a:lnTo>
-                    <a:pt x="286490" y="961855"/>
-                  </a:lnTo>
-                  <a:lnTo>
-                    <a:pt x="214867" y="888982"/>
-                  </a:lnTo>
-                  <a:lnTo>
-                    <a:pt x="143245" y="814004"/>
-                  </a:lnTo>
-                  <a:lnTo>
-                    <a:pt x="71622" y="736859"/>
-                  </a:lnTo>
-                  <a:lnTo>
-                    <a:pt x="0" y="657485"/>
+                    <a:pt x="2291920" y="153592"/>
+                  </a:lnTo>
+                  <a:lnTo>
+                    <a:pt x="2363543" y="536627"/>
+                  </a:lnTo>
+                  <a:lnTo>
+                    <a:pt x="2435165" y="875605"/>
+                  </a:lnTo>
+                  <a:lnTo>
+                    <a:pt x="2506788" y="1175594"/>
+                  </a:lnTo>
+                  <a:lnTo>
+                    <a:pt x="2578410" y="1441078"/>
+                  </a:lnTo>
+                  <a:lnTo>
+                    <a:pt x="2650033" y="1676026"/>
+                  </a:lnTo>
+                  <a:lnTo>
+                    <a:pt x="2721655" y="1883950"/>
+                  </a:lnTo>
+                  <a:lnTo>
+                    <a:pt x="2793278" y="2067959"/>
+                  </a:lnTo>
+                  <a:lnTo>
+                    <a:pt x="2864901" y="2230803"/>
+                  </a:lnTo>
+                  <a:lnTo>
+                    <a:pt x="2936523" y="2374917"/>
+                  </a:lnTo>
+                  <a:lnTo>
+                    <a:pt x="3008146" y="2502455"/>
+                  </a:lnTo>
+                  <a:lnTo>
+                    <a:pt x="3079768" y="2615323"/>
+                  </a:lnTo>
+                  <a:lnTo>
+                    <a:pt x="3151391" y="2668496"/>
+                  </a:lnTo>
+                  <a:lnTo>
+                    <a:pt x="3223013" y="2690756"/>
+                  </a:lnTo>
+                  <a:lnTo>
+                    <a:pt x="3294636" y="2712407"/>
+                  </a:lnTo>
+                  <a:lnTo>
+                    <a:pt x="3366258" y="2733468"/>
+                  </a:lnTo>
+                  <a:lnTo>
+                    <a:pt x="3437881" y="2753953"/>
+                  </a:lnTo>
+                  <a:lnTo>
+                    <a:pt x="3509503" y="2773879"/>
+                  </a:lnTo>
+                  <a:lnTo>
+                    <a:pt x="3581126" y="2793261"/>
+                  </a:lnTo>
+                  <a:lnTo>
+                    <a:pt x="3652748" y="2812114"/>
+                  </a:lnTo>
+                  <a:lnTo>
+                    <a:pt x="3724371" y="2830452"/>
+                  </a:lnTo>
+                  <a:lnTo>
+                    <a:pt x="3795993" y="2848289"/>
+                  </a:lnTo>
+                  <a:lnTo>
+                    <a:pt x="3867616" y="2865639"/>
+                  </a:lnTo>
+                  <a:lnTo>
+                    <a:pt x="3939238" y="2882516"/>
+                  </a:lnTo>
+                  <a:lnTo>
+                    <a:pt x="4010861" y="2898932"/>
+                  </a:lnTo>
+                  <a:lnTo>
+                    <a:pt x="4082483" y="2914899"/>
+                  </a:lnTo>
+                  <a:lnTo>
+                    <a:pt x="4154106" y="2930431"/>
+                  </a:lnTo>
+                  <a:lnTo>
+                    <a:pt x="4225729" y="2945539"/>
+                  </a:lnTo>
+                  <a:lnTo>
+                    <a:pt x="4297351" y="2960234"/>
+                  </a:lnTo>
+                  <a:lnTo>
+                    <a:pt x="4368974" y="2974527"/>
+                  </a:lnTo>
+                  <a:lnTo>
+                    <a:pt x="4440596" y="2988431"/>
+                  </a:lnTo>
+                  <a:lnTo>
+                    <a:pt x="4512219" y="3001955"/>
+                  </a:lnTo>
+                  <a:lnTo>
+                    <a:pt x="4583841" y="3015110"/>
+                  </a:lnTo>
+                  <a:lnTo>
+                    <a:pt x="4655464" y="3027905"/>
+                  </a:lnTo>
+                  <a:lnTo>
+                    <a:pt x="4727086" y="3040351"/>
+                  </a:lnTo>
+                  <a:lnTo>
+                    <a:pt x="4798709" y="3052458"/>
+                  </a:lnTo>
+                  <a:lnTo>
+                    <a:pt x="4870331" y="3064233"/>
+                  </a:lnTo>
+                  <a:lnTo>
+                    <a:pt x="4941954" y="3075688"/>
+                  </a:lnTo>
+                  <a:lnTo>
+                    <a:pt x="5013576" y="3086829"/>
+                  </a:lnTo>
+                  <a:lnTo>
+                    <a:pt x="5085199" y="3097666"/>
+                  </a:lnTo>
+                  <a:lnTo>
+                    <a:pt x="5156821" y="3108208"/>
+                  </a:lnTo>
+                  <a:lnTo>
+                    <a:pt x="5228444" y="3118461"/>
+                  </a:lnTo>
+                  <a:lnTo>
+                    <a:pt x="5300066" y="3128435"/>
+                  </a:lnTo>
+                  <a:lnTo>
+                    <a:pt x="5371689" y="3138136"/>
+                  </a:lnTo>
+                  <a:lnTo>
+                    <a:pt x="5443311" y="3147573"/>
+                  </a:lnTo>
+                  <a:lnTo>
+                    <a:pt x="5514934" y="3156751"/>
+                  </a:lnTo>
+                  <a:lnTo>
+                    <a:pt x="5586557" y="3165680"/>
+                  </a:lnTo>
+                  <a:lnTo>
+                    <a:pt x="5658179" y="3174364"/>
+                  </a:lnTo>
+                  <a:lnTo>
+                    <a:pt x="5729802" y="3182811"/>
+                  </a:lnTo>
+                  <a:lnTo>
+                    <a:pt x="5801424" y="3191028"/>
+                  </a:lnTo>
+                  <a:lnTo>
+                    <a:pt x="5873047" y="3199020"/>
+                  </a:lnTo>
+                  <a:lnTo>
+                    <a:pt x="5944669" y="3206794"/>
+                  </a:lnTo>
+                  <a:lnTo>
+                    <a:pt x="6016292" y="3214356"/>
+                  </a:lnTo>
+                  <a:lnTo>
+                    <a:pt x="6087914" y="3221711"/>
+                  </a:lnTo>
+                  <a:lnTo>
+                    <a:pt x="6159537" y="3228866"/>
+                  </a:lnTo>
+                  <a:lnTo>
+                    <a:pt x="6231159" y="3235825"/>
+                  </a:lnTo>
+                  <a:lnTo>
+                    <a:pt x="6302782" y="3242594"/>
+                  </a:lnTo>
+                  <a:lnTo>
+                    <a:pt x="6374404" y="3249179"/>
+                  </a:lnTo>
+                  <a:lnTo>
+                    <a:pt x="6446027" y="3255583"/>
+                  </a:lnTo>
+                  <a:lnTo>
+                    <a:pt x="6517649" y="3261813"/>
+                  </a:lnTo>
+                  <a:lnTo>
+                    <a:pt x="6589272" y="3267873"/>
+                  </a:lnTo>
+                  <a:lnTo>
+                    <a:pt x="6660894" y="3273767"/>
+                  </a:lnTo>
+                  <a:lnTo>
+                    <a:pt x="6732517" y="3279500"/>
+                  </a:lnTo>
+                  <a:lnTo>
+                    <a:pt x="6804139" y="3285077"/>
+                  </a:lnTo>
+                  <a:lnTo>
+                    <a:pt x="6875762" y="3290501"/>
+                  </a:lnTo>
+                  <a:lnTo>
+                    <a:pt x="6947385" y="3295777"/>
+                  </a:lnTo>
+                  <a:lnTo>
+                    <a:pt x="7019007" y="3300910"/>
+                  </a:lnTo>
+                  <a:lnTo>
+                    <a:pt x="7090630" y="3305902"/>
+                  </a:lnTo>
+                  <a:lnTo>
+                    <a:pt x="7090630" y="3482820"/>
+                  </a:lnTo>
+                  <a:lnTo>
+                    <a:pt x="7019007" y="3482699"/>
+                  </a:lnTo>
+                  <a:lnTo>
+                    <a:pt x="6947385" y="3482563"/>
+                  </a:lnTo>
+                  <a:lnTo>
+                    <a:pt x="6875762" y="3482409"/>
+                  </a:lnTo>
+                  <a:lnTo>
+                    <a:pt x="6804139" y="3482235"/>
+                  </a:lnTo>
+                  <a:lnTo>
+                    <a:pt x="6732517" y="3482039"/>
+                  </a:lnTo>
+                  <a:lnTo>
+                    <a:pt x="6660894" y="3481817"/>
+                  </a:lnTo>
+                  <a:lnTo>
+                    <a:pt x="6589272" y="3481566"/>
+                  </a:lnTo>
+                  <a:lnTo>
+                    <a:pt x="6517649" y="3481283"/>
+                  </a:lnTo>
+                  <a:lnTo>
+                    <a:pt x="6446027" y="3480963"/>
+                  </a:lnTo>
+                  <a:lnTo>
+                    <a:pt x="6374404" y="3480601"/>
+                  </a:lnTo>
+                  <a:lnTo>
+                    <a:pt x="6302782" y="3480192"/>
+                  </a:lnTo>
+                  <a:lnTo>
+                    <a:pt x="6231159" y="3479730"/>
+                  </a:lnTo>
+                  <a:lnTo>
+                    <a:pt x="6159537" y="3479208"/>
+                  </a:lnTo>
+                  <a:lnTo>
+                    <a:pt x="6087914" y="3478619"/>
+                  </a:lnTo>
+                  <a:lnTo>
+                    <a:pt x="6016292" y="3477952"/>
+                  </a:lnTo>
+                  <a:lnTo>
+                    <a:pt x="5944669" y="3477199"/>
+                  </a:lnTo>
+                  <a:lnTo>
+                    <a:pt x="5873047" y="3476348"/>
+                  </a:lnTo>
+                  <a:lnTo>
+                    <a:pt x="5801424" y="3475387"/>
+                  </a:lnTo>
+                  <a:lnTo>
+                    <a:pt x="5729802" y="3474300"/>
+                  </a:lnTo>
+                  <a:lnTo>
+                    <a:pt x="5658179" y="3473072"/>
+                  </a:lnTo>
+                  <a:lnTo>
+                    <a:pt x="5586557" y="3471685"/>
+                  </a:lnTo>
+                  <a:lnTo>
+                    <a:pt x="5514934" y="3470117"/>
+                  </a:lnTo>
+                  <a:lnTo>
+                    <a:pt x="5443311" y="3468346"/>
+                  </a:lnTo>
+                  <a:lnTo>
+                    <a:pt x="5371689" y="3466344"/>
+                  </a:lnTo>
+                  <a:lnTo>
+                    <a:pt x="5300066" y="3464083"/>
+                  </a:lnTo>
+                  <a:lnTo>
+                    <a:pt x="5228444" y="3461527"/>
+                  </a:lnTo>
+                  <a:lnTo>
+                    <a:pt x="5156821" y="3458639"/>
+                  </a:lnTo>
+                  <a:lnTo>
+                    <a:pt x="5085199" y="3455376"/>
+                  </a:lnTo>
+                  <a:lnTo>
+                    <a:pt x="5013576" y="3451689"/>
+                  </a:lnTo>
+                  <a:lnTo>
+                    <a:pt x="4941954" y="3447522"/>
+                  </a:lnTo>
+                  <a:lnTo>
+                    <a:pt x="4870331" y="3442814"/>
+                  </a:lnTo>
+                  <a:lnTo>
+                    <a:pt x="4798709" y="3437494"/>
+                  </a:lnTo>
+                  <a:lnTo>
+                    <a:pt x="4727086" y="3431483"/>
+                  </a:lnTo>
+                  <a:lnTo>
+                    <a:pt x="4655464" y="3424690"/>
+                  </a:lnTo>
+                  <a:lnTo>
+                    <a:pt x="4583841" y="3417015"/>
+                  </a:lnTo>
+                  <a:lnTo>
+                    <a:pt x="4512219" y="3408342"/>
+                  </a:lnTo>
+                  <a:lnTo>
+                    <a:pt x="4440596" y="3398541"/>
+                  </a:lnTo>
+                  <a:lnTo>
+                    <a:pt x="4368974" y="3387467"/>
+                  </a:lnTo>
+                  <a:lnTo>
+                    <a:pt x="4297351" y="3374954"/>
+                  </a:lnTo>
+                  <a:lnTo>
+                    <a:pt x="4225729" y="3360814"/>
+                  </a:lnTo>
+                  <a:lnTo>
+                    <a:pt x="4154106" y="3344837"/>
+                  </a:lnTo>
+                  <a:lnTo>
+                    <a:pt x="4082483" y="3326783"/>
+                  </a:lnTo>
+                  <a:lnTo>
+                    <a:pt x="4010861" y="3306382"/>
+                  </a:lnTo>
+                  <a:lnTo>
+                    <a:pt x="3939238" y="3283330"/>
+                  </a:lnTo>
+                  <a:lnTo>
+                    <a:pt x="3867616" y="3257283"/>
+                  </a:lnTo>
+                  <a:lnTo>
+                    <a:pt x="3795993" y="3227849"/>
+                  </a:lnTo>
+                  <a:lnTo>
+                    <a:pt x="3724371" y="3194590"/>
+                  </a:lnTo>
+                  <a:lnTo>
+                    <a:pt x="3652748" y="3157009"/>
+                  </a:lnTo>
+                  <a:lnTo>
+                    <a:pt x="3581126" y="3114543"/>
+                  </a:lnTo>
+                  <a:lnTo>
+                    <a:pt x="3509503" y="3066558"/>
+                  </a:lnTo>
+                  <a:lnTo>
+                    <a:pt x="3437881" y="3012337"/>
+                  </a:lnTo>
+                  <a:lnTo>
+                    <a:pt x="3366258" y="2951068"/>
+                  </a:lnTo>
+                  <a:lnTo>
+                    <a:pt x="3294636" y="2881836"/>
+                  </a:lnTo>
+                  <a:lnTo>
+                    <a:pt x="3223013" y="2803606"/>
+                  </a:lnTo>
+                  <a:lnTo>
+                    <a:pt x="3151391" y="2715209"/>
+                  </a:lnTo>
+                  <a:lnTo>
+                    <a:pt x="3079768" y="2645612"/>
+                  </a:lnTo>
+                  <a:lnTo>
+                    <a:pt x="3008146" y="2622086"/>
+                  </a:lnTo>
+                  <a:lnTo>
+                    <a:pt x="2936523" y="2597899"/>
+                  </a:lnTo>
+                  <a:lnTo>
+                    <a:pt x="2864901" y="2573033"/>
+                  </a:lnTo>
+                  <a:lnTo>
+                    <a:pt x="2793278" y="2547469"/>
+                  </a:lnTo>
+                  <a:lnTo>
+                    <a:pt x="2721655" y="2521188"/>
+                  </a:lnTo>
+                  <a:lnTo>
+                    <a:pt x="2650033" y="2494169"/>
+                  </a:lnTo>
+                  <a:lnTo>
+                    <a:pt x="2578410" y="2466391"/>
+                  </a:lnTo>
+                  <a:lnTo>
+                    <a:pt x="2506788" y="2437834"/>
+                  </a:lnTo>
+                  <a:lnTo>
+                    <a:pt x="2435165" y="2408475"/>
+                  </a:lnTo>
+                  <a:lnTo>
+                    <a:pt x="2363543" y="2378292"/>
+                  </a:lnTo>
+                  <a:lnTo>
+                    <a:pt x="2291920" y="2347262"/>
+                  </a:lnTo>
+                  <a:lnTo>
+                    <a:pt x="2220298" y="2315361"/>
+                  </a:lnTo>
+                  <a:lnTo>
+                    <a:pt x="2148675" y="2282564"/>
+                  </a:lnTo>
+                  <a:lnTo>
+                    <a:pt x="2077053" y="2248847"/>
+                  </a:lnTo>
+                  <a:lnTo>
+                    <a:pt x="2005430" y="2214183"/>
+                  </a:lnTo>
+                  <a:lnTo>
+                    <a:pt x="1933808" y="2178546"/>
+                  </a:lnTo>
+                  <a:lnTo>
+                    <a:pt x="1862185" y="2141909"/>
+                  </a:lnTo>
+                  <a:lnTo>
+                    <a:pt x="1790563" y="2104243"/>
+                  </a:lnTo>
+                  <a:lnTo>
+                    <a:pt x="1718940" y="2065521"/>
+                  </a:lnTo>
+                  <a:lnTo>
+                    <a:pt x="1647318" y="2025711"/>
+                  </a:lnTo>
+                  <a:lnTo>
+                    <a:pt x="1575695" y="1984784"/>
+                  </a:lnTo>
+                  <a:lnTo>
+                    <a:pt x="1504073" y="1942708"/>
+                  </a:lnTo>
+                  <a:lnTo>
+                    <a:pt x="1432450" y="1899451"/>
+                  </a:lnTo>
+                  <a:lnTo>
+                    <a:pt x="1360827" y="1854979"/>
+                  </a:lnTo>
+                  <a:lnTo>
+                    <a:pt x="1289205" y="1809260"/>
+                  </a:lnTo>
+                  <a:lnTo>
+                    <a:pt x="1217582" y="1762257"/>
+                  </a:lnTo>
+                  <a:lnTo>
+                    <a:pt x="1145960" y="1713934"/>
+                  </a:lnTo>
+                  <a:lnTo>
+                    <a:pt x="1074337" y="1664256"/>
+                  </a:lnTo>
+                  <a:lnTo>
+                    <a:pt x="1002715" y="1613182"/>
+                  </a:lnTo>
+                  <a:lnTo>
+                    <a:pt x="931092" y="1560675"/>
+                  </a:lnTo>
+                  <a:lnTo>
+                    <a:pt x="859470" y="1506695"/>
+                  </a:lnTo>
+                  <a:lnTo>
+                    <a:pt x="787847" y="1451199"/>
+                  </a:lnTo>
+                  <a:lnTo>
+                    <a:pt x="716225" y="1394145"/>
+                  </a:lnTo>
+                  <a:lnTo>
+                    <a:pt x="644602" y="1335490"/>
+                  </a:lnTo>
+                  <a:lnTo>
+                    <a:pt x="572980" y="1275188"/>
+                  </a:lnTo>
+                  <a:lnTo>
+                    <a:pt x="501357" y="1213193"/>
+                  </a:lnTo>
+                  <a:lnTo>
+                    <a:pt x="429735" y="1149459"/>
+                  </a:lnTo>
+                  <a:lnTo>
+                    <a:pt x="358112" y="1083935"/>
+                  </a:lnTo>
+                  <a:lnTo>
+                    <a:pt x="286490" y="1016572"/>
+                  </a:lnTo>
+                  <a:lnTo>
+                    <a:pt x="214867" y="947318"/>
+                  </a:lnTo>
+                  <a:lnTo>
+                    <a:pt x="143245" y="876121"/>
+                  </a:lnTo>
+                  <a:lnTo>
+                    <a:pt x="71622" y="802924"/>
+                  </a:lnTo>
+                  <a:lnTo>
+                    <a:pt x="0" y="727673"/>
                   </a:lnTo>
                   <a:lnTo>
                     <a:pt x="0" y="0"/>
@@ -3543,219 +3543,219 @@
           </p:nvSpPr>
           <p:spPr>
             <a:xfrm>
-              <a:off x="3398362" y="2073503"/>
-              <a:ext cx="4864316" cy="3315310"/>
+              <a:off x="3438553" y="2073503"/>
+              <a:ext cx="4824125" cy="3305902"/>
             </a:xfrm>
             <a:custGeom>
               <a:avLst/>
               <a:pathLst>
-                <a:path w="4864316" h="3315310">
+                <a:path w="4824125" h="3305902">
                   <a:moveTo>
                     <a:pt x="0" y="0"/>
                   </a:moveTo>
                   <a:lnTo>
-                    <a:pt x="65607" y="364399"/>
-                  </a:lnTo>
-                  <a:lnTo>
-                    <a:pt x="137230" y="717214"/>
-                  </a:lnTo>
-                  <a:lnTo>
-                    <a:pt x="208852" y="1030124"/>
-                  </a:lnTo>
-                  <a:lnTo>
-                    <a:pt x="280475" y="1307641"/>
-                  </a:lnTo>
-                  <a:lnTo>
-                    <a:pt x="352097" y="1553770"/>
-                  </a:lnTo>
-                  <a:lnTo>
-                    <a:pt x="423720" y="1772061"/>
-                  </a:lnTo>
-                  <a:lnTo>
-                    <a:pt x="495342" y="1965662"/>
-                  </a:lnTo>
-                  <a:lnTo>
-                    <a:pt x="566965" y="2137365"/>
-                  </a:lnTo>
-                  <a:lnTo>
-                    <a:pt x="638587" y="2289648"/>
-                  </a:lnTo>
-                  <a:lnTo>
-                    <a:pt x="710210" y="2424707"/>
-                  </a:lnTo>
-                  <a:lnTo>
-                    <a:pt x="781832" y="2544490"/>
-                  </a:lnTo>
-                  <a:lnTo>
-                    <a:pt x="853455" y="2650725"/>
-                  </a:lnTo>
-                  <a:lnTo>
-                    <a:pt x="925077" y="2676759"/>
-                  </a:lnTo>
-                  <a:lnTo>
-                    <a:pt x="996700" y="2699422"/>
-                  </a:lnTo>
-                  <a:lnTo>
-                    <a:pt x="1068322" y="2721450"/>
-                  </a:lnTo>
-                  <a:lnTo>
-                    <a:pt x="1139945" y="2742858"/>
-                  </a:lnTo>
-                  <a:lnTo>
-                    <a:pt x="1211567" y="2763666"/>
-                  </a:lnTo>
-                  <a:lnTo>
-                    <a:pt x="1283190" y="2783889"/>
-                  </a:lnTo>
-                  <a:lnTo>
-                    <a:pt x="1354812" y="2803544"/>
-                  </a:lnTo>
-                  <a:lnTo>
-                    <a:pt x="1426435" y="2822647"/>
-                  </a:lnTo>
-                  <a:lnTo>
-                    <a:pt x="1498057" y="2841214"/>
-                  </a:lnTo>
-                  <a:lnTo>
-                    <a:pt x="1569680" y="2859259"/>
-                  </a:lnTo>
-                  <a:lnTo>
-                    <a:pt x="1641303" y="2876797"/>
-                  </a:lnTo>
-                  <a:lnTo>
-                    <a:pt x="1712925" y="2893843"/>
-                  </a:lnTo>
-                  <a:lnTo>
-                    <a:pt x="1784548" y="2910410"/>
-                  </a:lnTo>
-                  <a:lnTo>
-                    <a:pt x="1856170" y="2926512"/>
-                  </a:lnTo>
-                  <a:lnTo>
-                    <a:pt x="1927793" y="2942162"/>
-                  </a:lnTo>
-                  <a:lnTo>
-                    <a:pt x="1999415" y="2957372"/>
-                  </a:lnTo>
-                  <a:lnTo>
-                    <a:pt x="2071038" y="2972155"/>
-                  </a:lnTo>
-                  <a:lnTo>
-                    <a:pt x="2142660" y="2986523"/>
-                  </a:lnTo>
-                  <a:lnTo>
-                    <a:pt x="2214283" y="3000487"/>
-                  </a:lnTo>
-                  <a:lnTo>
-                    <a:pt x="2285905" y="3014059"/>
-                  </a:lnTo>
-                  <a:lnTo>
-                    <a:pt x="2357528" y="3027250"/>
-                  </a:lnTo>
-                  <a:lnTo>
-                    <a:pt x="2429150" y="3040070"/>
-                  </a:lnTo>
-                  <a:lnTo>
-                    <a:pt x="2500773" y="3052531"/>
-                  </a:lnTo>
-                  <a:lnTo>
-                    <a:pt x="2572395" y="3064641"/>
-                  </a:lnTo>
-                  <a:lnTo>
-                    <a:pt x="2644018" y="3076412"/>
-                  </a:lnTo>
-                  <a:lnTo>
-                    <a:pt x="2715640" y="3087851"/>
-                  </a:lnTo>
-                  <a:lnTo>
-                    <a:pt x="2787263" y="3098970"/>
-                  </a:lnTo>
-                  <a:lnTo>
-                    <a:pt x="2858885" y="3109776"/>
-                  </a:lnTo>
-                  <a:lnTo>
-                    <a:pt x="2930508" y="3120279"/>
-                  </a:lnTo>
-                  <a:lnTo>
-                    <a:pt x="3002131" y="3130487"/>
-                  </a:lnTo>
-                  <a:lnTo>
-                    <a:pt x="3073753" y="3140408"/>
-                  </a:lnTo>
-                  <a:lnTo>
-                    <a:pt x="3145376" y="3150050"/>
-                  </a:lnTo>
-                  <a:lnTo>
-                    <a:pt x="3216998" y="3159422"/>
-                  </a:lnTo>
-                  <a:lnTo>
-                    <a:pt x="3288621" y="3168531"/>
-                  </a:lnTo>
-                  <a:lnTo>
-                    <a:pt x="3360243" y="3177383"/>
-                  </a:lnTo>
-                  <a:lnTo>
-                    <a:pt x="3431866" y="3185987"/>
-                  </a:lnTo>
-                  <a:lnTo>
-                    <a:pt x="3503488" y="3194350"/>
-                  </a:lnTo>
-                  <a:lnTo>
-                    <a:pt x="3575111" y="3202477"/>
-                  </a:lnTo>
-                  <a:lnTo>
-                    <a:pt x="3646733" y="3210377"/>
-                  </a:lnTo>
-                  <a:lnTo>
-                    <a:pt x="3718356" y="3218054"/>
-                  </a:lnTo>
-                  <a:lnTo>
-                    <a:pt x="3789978" y="3225516"/>
-                  </a:lnTo>
-                  <a:lnTo>
-                    <a:pt x="3861601" y="3232768"/>
-                  </a:lnTo>
-                  <a:lnTo>
-                    <a:pt x="3933223" y="3239817"/>
-                  </a:lnTo>
-                  <a:lnTo>
-                    <a:pt x="4004846" y="3246667"/>
-                  </a:lnTo>
-                  <a:lnTo>
-                    <a:pt x="4076468" y="3253326"/>
-                  </a:lnTo>
-                  <a:lnTo>
-                    <a:pt x="4148091" y="3259797"/>
-                  </a:lnTo>
-                  <a:lnTo>
-                    <a:pt x="4219713" y="3266086"/>
-                  </a:lnTo>
-                  <a:lnTo>
-                    <a:pt x="4291336" y="3272199"/>
-                  </a:lnTo>
-                  <a:lnTo>
-                    <a:pt x="4362959" y="3278140"/>
-                  </a:lnTo>
-                  <a:lnTo>
-                    <a:pt x="4434581" y="3283915"/>
-                  </a:lnTo>
-                  <a:lnTo>
-                    <a:pt x="4506204" y="3289527"/>
-                  </a:lnTo>
-                  <a:lnTo>
-                    <a:pt x="4577826" y="3294981"/>
-                  </a:lnTo>
-                  <a:lnTo>
-                    <a:pt x="4649449" y="3300283"/>
-                  </a:lnTo>
-                  <a:lnTo>
-                    <a:pt x="4721071" y="3305435"/>
-                  </a:lnTo>
-                  <a:lnTo>
-                    <a:pt x="4792694" y="3310443"/>
-                  </a:lnTo>
-                  <a:lnTo>
-                    <a:pt x="4864316" y="3315310"/>
+                    <a:pt x="25416" y="153592"/>
+                  </a:lnTo>
+                  <a:lnTo>
+                    <a:pt x="97039" y="536627"/>
+                  </a:lnTo>
+                  <a:lnTo>
+                    <a:pt x="168661" y="875605"/>
+                  </a:lnTo>
+                  <a:lnTo>
+                    <a:pt x="240284" y="1175594"/>
+                  </a:lnTo>
+                  <a:lnTo>
+                    <a:pt x="311906" y="1441078"/>
+                  </a:lnTo>
+                  <a:lnTo>
+                    <a:pt x="383529" y="1676026"/>
+                  </a:lnTo>
+                  <a:lnTo>
+                    <a:pt x="455151" y="1883950"/>
+                  </a:lnTo>
+                  <a:lnTo>
+                    <a:pt x="526774" y="2067959"/>
+                  </a:lnTo>
+                  <a:lnTo>
+                    <a:pt x="598396" y="2230803"/>
+                  </a:lnTo>
+                  <a:lnTo>
+                    <a:pt x="670019" y="2374917"/>
+                  </a:lnTo>
+                  <a:lnTo>
+                    <a:pt x="741641" y="2502455"/>
+                  </a:lnTo>
+                  <a:lnTo>
+                    <a:pt x="813264" y="2615323"/>
+                  </a:lnTo>
+                  <a:lnTo>
+                    <a:pt x="884886" y="2668496"/>
+                  </a:lnTo>
+                  <a:lnTo>
+                    <a:pt x="956509" y="2690756"/>
+                  </a:lnTo>
+                  <a:lnTo>
+                    <a:pt x="1028131" y="2712407"/>
+                  </a:lnTo>
+                  <a:lnTo>
+                    <a:pt x="1099754" y="2733468"/>
+                  </a:lnTo>
+                  <a:lnTo>
+                    <a:pt x="1171376" y="2753953"/>
+                  </a:lnTo>
+                  <a:lnTo>
+                    <a:pt x="1242999" y="2773879"/>
+                  </a:lnTo>
+                  <a:lnTo>
+                    <a:pt x="1314622" y="2793261"/>
+                  </a:lnTo>
+                  <a:lnTo>
+                    <a:pt x="1386244" y="2812114"/>
+                  </a:lnTo>
+                  <a:lnTo>
+                    <a:pt x="1457867" y="2830452"/>
+                  </a:lnTo>
+                  <a:lnTo>
+                    <a:pt x="1529489" y="2848289"/>
+                  </a:lnTo>
+                  <a:lnTo>
+                    <a:pt x="1601112" y="2865639"/>
+                  </a:lnTo>
+                  <a:lnTo>
+                    <a:pt x="1672734" y="2882516"/>
+                  </a:lnTo>
+                  <a:lnTo>
+                    <a:pt x="1744357" y="2898932"/>
+                  </a:lnTo>
+                  <a:lnTo>
+                    <a:pt x="1815979" y="2914899"/>
+                  </a:lnTo>
+                  <a:lnTo>
+                    <a:pt x="1887602" y="2930431"/>
+                  </a:lnTo>
+                  <a:lnTo>
+                    <a:pt x="1959224" y="2945539"/>
+                  </a:lnTo>
+                  <a:lnTo>
+                    <a:pt x="2030847" y="2960234"/>
+                  </a:lnTo>
+                  <a:lnTo>
+                    <a:pt x="2102469" y="2974527"/>
+                  </a:lnTo>
+                  <a:lnTo>
+                    <a:pt x="2174092" y="2988431"/>
+                  </a:lnTo>
+                  <a:lnTo>
+                    <a:pt x="2245714" y="3001955"/>
+                  </a:lnTo>
+                  <a:lnTo>
+                    <a:pt x="2317337" y="3015110"/>
+                  </a:lnTo>
+                  <a:lnTo>
+                    <a:pt x="2388959" y="3027905"/>
+                  </a:lnTo>
+                  <a:lnTo>
+                    <a:pt x="2460582" y="3040351"/>
+                  </a:lnTo>
+                  <a:lnTo>
+                    <a:pt x="2532204" y="3052458"/>
+                  </a:lnTo>
+                  <a:lnTo>
+                    <a:pt x="2603827" y="3064233"/>
+                  </a:lnTo>
+                  <a:lnTo>
+                    <a:pt x="2675449" y="3075688"/>
+                  </a:lnTo>
+                  <a:lnTo>
+                    <a:pt x="2747072" y="3086829"/>
+                  </a:lnTo>
+                  <a:lnTo>
+                    <a:pt x="2818695" y="3097666"/>
+                  </a:lnTo>
+                  <a:lnTo>
+                    <a:pt x="2890317" y="3108208"/>
+                  </a:lnTo>
+                  <a:lnTo>
+                    <a:pt x="2961940" y="3118461"/>
+                  </a:lnTo>
+                  <a:lnTo>
+                    <a:pt x="3033562" y="3128435"/>
+                  </a:lnTo>
+                  <a:lnTo>
+                    <a:pt x="3105185" y="3138136"/>
+                  </a:lnTo>
+                  <a:lnTo>
+                    <a:pt x="3176807" y="3147573"/>
+                  </a:lnTo>
+                  <a:lnTo>
+                    <a:pt x="3248430" y="3156751"/>
+                  </a:lnTo>
+                  <a:lnTo>
+                    <a:pt x="3320052" y="3165680"/>
+                  </a:lnTo>
+                  <a:lnTo>
+                    <a:pt x="3391675" y="3174364"/>
+                  </a:lnTo>
+                  <a:lnTo>
+                    <a:pt x="3463297" y="3182811"/>
+                  </a:lnTo>
+                  <a:lnTo>
+                    <a:pt x="3534920" y="3191028"/>
+                  </a:lnTo>
+                  <a:lnTo>
+                    <a:pt x="3606542" y="3199020"/>
+                  </a:lnTo>
+                  <a:lnTo>
+                    <a:pt x="3678165" y="3206794"/>
+                  </a:lnTo>
+                  <a:lnTo>
+                    <a:pt x="3749787" y="3214356"/>
+                  </a:lnTo>
+                  <a:lnTo>
+                    <a:pt x="3821410" y="3221711"/>
+                  </a:lnTo>
+                  <a:lnTo>
+                    <a:pt x="3893032" y="3228866"/>
+                  </a:lnTo>
+                  <a:lnTo>
+                    <a:pt x="3964655" y="3235825"/>
+                  </a:lnTo>
+                  <a:lnTo>
+                    <a:pt x="4036277" y="3242594"/>
+                  </a:lnTo>
+                  <a:lnTo>
+                    <a:pt x="4107900" y="3249179"/>
+                  </a:lnTo>
+                  <a:lnTo>
+                    <a:pt x="4179523" y="3255583"/>
+                  </a:lnTo>
+                  <a:lnTo>
+                    <a:pt x="4251145" y="3261813"/>
+                  </a:lnTo>
+                  <a:lnTo>
+                    <a:pt x="4322768" y="3267873"/>
+                  </a:lnTo>
+                  <a:lnTo>
+                    <a:pt x="4394390" y="3273767"/>
+                  </a:lnTo>
+                  <a:lnTo>
+                    <a:pt x="4466013" y="3279500"/>
+                  </a:lnTo>
+                  <a:lnTo>
+                    <a:pt x="4537635" y="3285077"/>
+                  </a:lnTo>
+                  <a:lnTo>
+                    <a:pt x="4609258" y="3290501"/>
+                  </a:lnTo>
+                  <a:lnTo>
+                    <a:pt x="4680880" y="3295777"/>
+                  </a:lnTo>
+                  <a:lnTo>
+                    <a:pt x="4752503" y="3300910"/>
+                  </a:lnTo>
+                  <a:lnTo>
+                    <a:pt x="4824125" y="3305902"/>
                   </a:lnTo>
                 </a:path>
               </a:pathLst>
@@ -3775,309 +3775,309 @@
           </p:nvSpPr>
           <p:spPr>
             <a:xfrm>
-              <a:off x="1172049" y="2730988"/>
-              <a:ext cx="7090630" cy="2825257"/>
+              <a:off x="1172049" y="2801176"/>
+              <a:ext cx="7090630" cy="2755146"/>
             </a:xfrm>
             <a:custGeom>
               <a:avLst/>
               <a:pathLst>
-                <a:path w="7090630" h="2825257">
+                <a:path w="7090630" h="2755146">
                   <a:moveTo>
-                    <a:pt x="7090630" y="2825257"/>
+                    <a:pt x="7090630" y="2755146"/>
                   </a:moveTo>
                   <a:lnTo>
-                    <a:pt x="7019007" y="2825129"/>
-                  </a:lnTo>
-                  <a:lnTo>
-                    <a:pt x="6947385" y="2824985"/>
-                  </a:lnTo>
-                  <a:lnTo>
-                    <a:pt x="6875762" y="2824822"/>
-                  </a:lnTo>
-                  <a:lnTo>
-                    <a:pt x="6804139" y="2824639"/>
-                  </a:lnTo>
-                  <a:lnTo>
-                    <a:pt x="6732517" y="2824432"/>
-                  </a:lnTo>
-                  <a:lnTo>
-                    <a:pt x="6660894" y="2824199"/>
-                  </a:lnTo>
-                  <a:lnTo>
-                    <a:pt x="6589272" y="2823936"/>
-                  </a:lnTo>
-                  <a:lnTo>
-                    <a:pt x="6517649" y="2823639"/>
-                  </a:lnTo>
-                  <a:lnTo>
-                    <a:pt x="6446027" y="2823305"/>
-                  </a:lnTo>
-                  <a:lnTo>
-                    <a:pt x="6374404" y="2822928"/>
-                  </a:lnTo>
-                  <a:lnTo>
-                    <a:pt x="6302782" y="2822503"/>
-                  </a:lnTo>
-                  <a:lnTo>
-                    <a:pt x="6231159" y="2822024"/>
-                  </a:lnTo>
-                  <a:lnTo>
-                    <a:pt x="6159537" y="2821484"/>
-                  </a:lnTo>
-                  <a:lnTo>
-                    <a:pt x="6087914" y="2820875"/>
-                  </a:lnTo>
-                  <a:lnTo>
-                    <a:pt x="6016292" y="2820188"/>
-                  </a:lnTo>
-                  <a:lnTo>
-                    <a:pt x="5944669" y="2819413"/>
-                  </a:lnTo>
-                  <a:lnTo>
-                    <a:pt x="5873047" y="2818540"/>
-                  </a:lnTo>
-                  <a:lnTo>
-                    <a:pt x="5801424" y="2817555"/>
-                  </a:lnTo>
-                  <a:lnTo>
-                    <a:pt x="5729802" y="2816445"/>
-                  </a:lnTo>
-                  <a:lnTo>
-                    <a:pt x="5658179" y="2815193"/>
-                  </a:lnTo>
-                  <a:lnTo>
-                    <a:pt x="5586557" y="2813782"/>
-                  </a:lnTo>
-                  <a:lnTo>
-                    <a:pt x="5514934" y="2812190"/>
-                  </a:lnTo>
-                  <a:lnTo>
-                    <a:pt x="5443311" y="2810396"/>
-                  </a:lnTo>
-                  <a:lnTo>
-                    <a:pt x="5371689" y="2808373"/>
-                  </a:lnTo>
-                  <a:lnTo>
-                    <a:pt x="5300066" y="2806091"/>
-                  </a:lnTo>
-                  <a:lnTo>
-                    <a:pt x="5228444" y="2803519"/>
-                  </a:lnTo>
-                  <a:lnTo>
-                    <a:pt x="5156821" y="2800619"/>
-                  </a:lnTo>
-                  <a:lnTo>
-                    <a:pt x="5085199" y="2797349"/>
-                  </a:lnTo>
-                  <a:lnTo>
-                    <a:pt x="5013576" y="2793662"/>
-                  </a:lnTo>
-                  <a:lnTo>
-                    <a:pt x="4941954" y="2789505"/>
-                  </a:lnTo>
-                  <a:lnTo>
-                    <a:pt x="4870331" y="2784817"/>
-                  </a:lnTo>
-                  <a:lnTo>
-                    <a:pt x="4798709" y="2779532"/>
-                  </a:lnTo>
-                  <a:lnTo>
-                    <a:pt x="4727086" y="2773573"/>
-                  </a:lnTo>
-                  <a:lnTo>
-                    <a:pt x="4655464" y="2766853"/>
-                  </a:lnTo>
-                  <a:lnTo>
-                    <a:pt x="4583841" y="2759277"/>
-                  </a:lnTo>
-                  <a:lnTo>
-                    <a:pt x="4512219" y="2750735"/>
-                  </a:lnTo>
-                  <a:lnTo>
-                    <a:pt x="4440596" y="2741103"/>
-                  </a:lnTo>
-                  <a:lnTo>
-                    <a:pt x="4368974" y="2730243"/>
-                  </a:lnTo>
-                  <a:lnTo>
-                    <a:pt x="4297351" y="2717997"/>
-                  </a:lnTo>
-                  <a:lnTo>
-                    <a:pt x="4225729" y="2704191"/>
-                  </a:lnTo>
-                  <a:lnTo>
-                    <a:pt x="4154106" y="2688623"/>
-                  </a:lnTo>
-                  <a:lnTo>
-                    <a:pt x="4082483" y="2671070"/>
-                  </a:lnTo>
-                  <a:lnTo>
-                    <a:pt x="4010861" y="2651279"/>
-                  </a:lnTo>
-                  <a:lnTo>
-                    <a:pt x="3939238" y="2628964"/>
-                  </a:lnTo>
-                  <a:lnTo>
-                    <a:pt x="3867616" y="2603802"/>
-                  </a:lnTo>
-                  <a:lnTo>
-                    <a:pt x="3795993" y="2575432"/>
-                  </a:lnTo>
-                  <a:lnTo>
-                    <a:pt x="3724371" y="2543444"/>
-                  </a:lnTo>
-                  <a:lnTo>
-                    <a:pt x="3652748" y="2507377"/>
-                  </a:lnTo>
-                  <a:lnTo>
-                    <a:pt x="3581126" y="2466710"/>
-                  </a:lnTo>
-                  <a:lnTo>
-                    <a:pt x="3509503" y="2420856"/>
-                  </a:lnTo>
-                  <a:lnTo>
-                    <a:pt x="3437881" y="2369155"/>
-                  </a:lnTo>
-                  <a:lnTo>
-                    <a:pt x="3366258" y="2310861"/>
-                  </a:lnTo>
-                  <a:lnTo>
-                    <a:pt x="3294636" y="2245132"/>
-                  </a:lnTo>
-                  <a:lnTo>
-                    <a:pt x="3223013" y="2171021"/>
-                  </a:lnTo>
-                  <a:lnTo>
-                    <a:pt x="3151391" y="2087458"/>
-                  </a:lnTo>
-                  <a:lnTo>
-                    <a:pt x="3079768" y="1995954"/>
-                  </a:lnTo>
-                  <a:lnTo>
-                    <a:pt x="3008146" y="1971962"/>
-                  </a:lnTo>
-                  <a:lnTo>
-                    <a:pt x="2936523" y="1947276"/>
-                  </a:lnTo>
-                  <a:lnTo>
-                    <a:pt x="2864901" y="1921877"/>
-                  </a:lnTo>
-                  <a:lnTo>
-                    <a:pt x="2793278" y="1895743"/>
-                  </a:lnTo>
-                  <a:lnTo>
-                    <a:pt x="2721655" y="1868855"/>
-                  </a:lnTo>
-                  <a:lnTo>
-                    <a:pt x="2650033" y="1841190"/>
-                  </a:lnTo>
-                  <a:lnTo>
-                    <a:pt x="2578410" y="1812725"/>
-                  </a:lnTo>
-                  <a:lnTo>
-                    <a:pt x="2506788" y="1783438"/>
-                  </a:lnTo>
-                  <a:lnTo>
-                    <a:pt x="2435165" y="1753305"/>
-                  </a:lnTo>
-                  <a:lnTo>
-                    <a:pt x="2363543" y="1722301"/>
-                  </a:lnTo>
-                  <a:lnTo>
-                    <a:pt x="2291920" y="1690401"/>
-                  </a:lnTo>
-                  <a:lnTo>
-                    <a:pt x="2220298" y="1657579"/>
-                  </a:lnTo>
-                  <a:lnTo>
-                    <a:pt x="2148675" y="1623809"/>
-                  </a:lnTo>
-                  <a:lnTo>
-                    <a:pt x="2077053" y="1589063"/>
-                  </a:lnTo>
-                  <a:lnTo>
-                    <a:pt x="2005430" y="1553312"/>
-                  </a:lnTo>
-                  <a:lnTo>
-                    <a:pt x="1933808" y="1516529"/>
-                  </a:lnTo>
-                  <a:lnTo>
-                    <a:pt x="1862185" y="1478683"/>
-                  </a:lnTo>
-                  <a:lnTo>
-                    <a:pt x="1790563" y="1439744"/>
-                  </a:lnTo>
-                  <a:lnTo>
-                    <a:pt x="1718940" y="1399679"/>
-                  </a:lnTo>
-                  <a:lnTo>
-                    <a:pt x="1647318" y="1358456"/>
-                  </a:lnTo>
-                  <a:lnTo>
-                    <a:pt x="1575695" y="1316043"/>
-                  </a:lnTo>
-                  <a:lnTo>
-                    <a:pt x="1504073" y="1272403"/>
-                  </a:lnTo>
-                  <a:lnTo>
-                    <a:pt x="1432450" y="1227503"/>
-                  </a:lnTo>
-                  <a:lnTo>
-                    <a:pt x="1360827" y="1181305"/>
-                  </a:lnTo>
-                  <a:lnTo>
-                    <a:pt x="1289205" y="1133773"/>
-                  </a:lnTo>
-                  <a:lnTo>
-                    <a:pt x="1217582" y="1084867"/>
-                  </a:lnTo>
-                  <a:lnTo>
-                    <a:pt x="1145960" y="1034547"/>
-                  </a:lnTo>
-                  <a:lnTo>
-                    <a:pt x="1074337" y="982774"/>
-                  </a:lnTo>
-                  <a:lnTo>
-                    <a:pt x="1002715" y="929504"/>
-                  </a:lnTo>
-                  <a:lnTo>
-                    <a:pt x="931092" y="874696"/>
-                  </a:lnTo>
-                  <a:lnTo>
-                    <a:pt x="859470" y="818303"/>
-                  </a:lnTo>
-                  <a:lnTo>
-                    <a:pt x="787847" y="760281"/>
-                  </a:lnTo>
-                  <a:lnTo>
-                    <a:pt x="716225" y="700583"/>
-                  </a:lnTo>
-                  <a:lnTo>
-                    <a:pt x="644602" y="639159"/>
-                  </a:lnTo>
-                  <a:lnTo>
-                    <a:pt x="572980" y="575961"/>
-                  </a:lnTo>
-                  <a:lnTo>
-                    <a:pt x="501357" y="510936"/>
-                  </a:lnTo>
-                  <a:lnTo>
-                    <a:pt x="429735" y="444032"/>
-                  </a:lnTo>
-                  <a:lnTo>
-                    <a:pt x="358112" y="375195"/>
-                  </a:lnTo>
-                  <a:lnTo>
-                    <a:pt x="286490" y="304369"/>
-                  </a:lnTo>
-                  <a:lnTo>
-                    <a:pt x="214867" y="231497"/>
-                  </a:lnTo>
-                  <a:lnTo>
-                    <a:pt x="143245" y="156518"/>
-                  </a:lnTo>
-                  <a:lnTo>
-                    <a:pt x="71622" y="79374"/>
+                    <a:pt x="7019007" y="2755025"/>
+                  </a:lnTo>
+                  <a:lnTo>
+                    <a:pt x="6947385" y="2754889"/>
+                  </a:lnTo>
+                  <a:lnTo>
+                    <a:pt x="6875762" y="2754735"/>
+                  </a:lnTo>
+                  <a:lnTo>
+                    <a:pt x="6804139" y="2754561"/>
+                  </a:lnTo>
+                  <a:lnTo>
+                    <a:pt x="6732517" y="2754365"/>
+                  </a:lnTo>
+                  <a:lnTo>
+                    <a:pt x="6660894" y="2754143"/>
+                  </a:lnTo>
+                  <a:lnTo>
+                    <a:pt x="6589272" y="2753892"/>
+                  </a:lnTo>
+                  <a:lnTo>
+                    <a:pt x="6517649" y="2753609"/>
+                  </a:lnTo>
+                  <a:lnTo>
+                    <a:pt x="6446027" y="2753289"/>
+                  </a:lnTo>
+                  <a:lnTo>
+                    <a:pt x="6374404" y="2752927"/>
+                  </a:lnTo>
+                  <a:lnTo>
+                    <a:pt x="6302782" y="2752518"/>
+                  </a:lnTo>
+                  <a:lnTo>
+                    <a:pt x="6231159" y="2752056"/>
+                  </a:lnTo>
+                  <a:lnTo>
+                    <a:pt x="6159537" y="2751534"/>
+                  </a:lnTo>
+                  <a:lnTo>
+                    <a:pt x="6087914" y="2750945"/>
+                  </a:lnTo>
+                  <a:lnTo>
+                    <a:pt x="6016292" y="2750278"/>
+                  </a:lnTo>
+                  <a:lnTo>
+                    <a:pt x="5944669" y="2749525"/>
+                  </a:lnTo>
+                  <a:lnTo>
+                    <a:pt x="5873047" y="2748674"/>
+                  </a:lnTo>
+                  <a:lnTo>
+                    <a:pt x="5801424" y="2747713"/>
+                  </a:lnTo>
+                  <a:lnTo>
+                    <a:pt x="5729802" y="2746626"/>
+                  </a:lnTo>
+                  <a:lnTo>
+                    <a:pt x="5658179" y="2745398"/>
+                  </a:lnTo>
+                  <a:lnTo>
+                    <a:pt x="5586557" y="2744011"/>
+                  </a:lnTo>
+                  <a:lnTo>
+                    <a:pt x="5514934" y="2742443"/>
+                  </a:lnTo>
+                  <a:lnTo>
+                    <a:pt x="5443311" y="2740672"/>
+                  </a:lnTo>
+                  <a:lnTo>
+                    <a:pt x="5371689" y="2738670"/>
+                  </a:lnTo>
+                  <a:lnTo>
+                    <a:pt x="5300066" y="2736409"/>
+                  </a:lnTo>
+                  <a:lnTo>
+                    <a:pt x="5228444" y="2733853"/>
+                  </a:lnTo>
+                  <a:lnTo>
+                    <a:pt x="5156821" y="2730965"/>
+                  </a:lnTo>
+                  <a:lnTo>
+                    <a:pt x="5085199" y="2727702"/>
+                  </a:lnTo>
+                  <a:lnTo>
+                    <a:pt x="5013576" y="2724015"/>
+                  </a:lnTo>
+                  <a:lnTo>
+                    <a:pt x="4941954" y="2719848"/>
+                  </a:lnTo>
+                  <a:lnTo>
+                    <a:pt x="4870331" y="2715140"/>
+                  </a:lnTo>
+                  <a:lnTo>
+                    <a:pt x="4798709" y="2709820"/>
+                  </a:lnTo>
+                  <a:lnTo>
+                    <a:pt x="4727086" y="2703809"/>
+                  </a:lnTo>
+                  <a:lnTo>
+                    <a:pt x="4655464" y="2697016"/>
+                  </a:lnTo>
+                  <a:lnTo>
+                    <a:pt x="4583841" y="2689341"/>
+                  </a:lnTo>
+                  <a:lnTo>
+                    <a:pt x="4512219" y="2680668"/>
+                  </a:lnTo>
+                  <a:lnTo>
+                    <a:pt x="4440596" y="2670867"/>
+                  </a:lnTo>
+                  <a:lnTo>
+                    <a:pt x="4368974" y="2659793"/>
+                  </a:lnTo>
+                  <a:lnTo>
+                    <a:pt x="4297351" y="2647280"/>
+                  </a:lnTo>
+                  <a:lnTo>
+                    <a:pt x="4225729" y="2633140"/>
+                  </a:lnTo>
+                  <a:lnTo>
+                    <a:pt x="4154106" y="2617163"/>
+                  </a:lnTo>
+                  <a:lnTo>
+                    <a:pt x="4082483" y="2599109"/>
+                  </a:lnTo>
+                  <a:lnTo>
+                    <a:pt x="4010861" y="2578708"/>
+                  </a:lnTo>
+                  <a:lnTo>
+                    <a:pt x="3939238" y="2555657"/>
+                  </a:lnTo>
+                  <a:lnTo>
+                    <a:pt x="3867616" y="2529609"/>
+                  </a:lnTo>
+                  <a:lnTo>
+                    <a:pt x="3795993" y="2500175"/>
+                  </a:lnTo>
+                  <a:lnTo>
+                    <a:pt x="3724371" y="2466917"/>
+                  </a:lnTo>
+                  <a:lnTo>
+                    <a:pt x="3652748" y="2429335"/>
+                  </a:lnTo>
+                  <a:lnTo>
+                    <a:pt x="3581126" y="2386869"/>
+                  </a:lnTo>
+                  <a:lnTo>
+                    <a:pt x="3509503" y="2338884"/>
+                  </a:lnTo>
+                  <a:lnTo>
+                    <a:pt x="3437881" y="2284663"/>
+                  </a:lnTo>
+                  <a:lnTo>
+                    <a:pt x="3366258" y="2223394"/>
+                  </a:lnTo>
+                  <a:lnTo>
+                    <a:pt x="3294636" y="2154162"/>
+                  </a:lnTo>
+                  <a:lnTo>
+                    <a:pt x="3223013" y="2075932"/>
+                  </a:lnTo>
+                  <a:lnTo>
+                    <a:pt x="3151391" y="1987535"/>
+                  </a:lnTo>
+                  <a:lnTo>
+                    <a:pt x="3079768" y="1917938"/>
+                  </a:lnTo>
+                  <a:lnTo>
+                    <a:pt x="3008146" y="1894412"/>
+                  </a:lnTo>
+                  <a:lnTo>
+                    <a:pt x="2936523" y="1870225"/>
+                  </a:lnTo>
+                  <a:lnTo>
+                    <a:pt x="2864901" y="1845359"/>
+                  </a:lnTo>
+                  <a:lnTo>
+                    <a:pt x="2793278" y="1819795"/>
+                  </a:lnTo>
+                  <a:lnTo>
+                    <a:pt x="2721655" y="1793514"/>
+                  </a:lnTo>
+                  <a:lnTo>
+                    <a:pt x="2650033" y="1766495"/>
+                  </a:lnTo>
+                  <a:lnTo>
+                    <a:pt x="2578410" y="1738717"/>
+                  </a:lnTo>
+                  <a:lnTo>
+                    <a:pt x="2506788" y="1710160"/>
+                  </a:lnTo>
+                  <a:lnTo>
+                    <a:pt x="2435165" y="1680801"/>
+                  </a:lnTo>
+                  <a:lnTo>
+                    <a:pt x="2363543" y="1650618"/>
+                  </a:lnTo>
+                  <a:lnTo>
+                    <a:pt x="2291920" y="1619588"/>
+                  </a:lnTo>
+                  <a:lnTo>
+                    <a:pt x="2220298" y="1587687"/>
+                  </a:lnTo>
+                  <a:lnTo>
+                    <a:pt x="2148675" y="1554890"/>
+                  </a:lnTo>
+                  <a:lnTo>
+                    <a:pt x="2077053" y="1521173"/>
+                  </a:lnTo>
+                  <a:lnTo>
+                    <a:pt x="2005430" y="1486509"/>
+                  </a:lnTo>
+                  <a:lnTo>
+                    <a:pt x="1933808" y="1450872"/>
+                  </a:lnTo>
+                  <a:lnTo>
+                    <a:pt x="1862185" y="1414235"/>
+                  </a:lnTo>
+                  <a:lnTo>
+                    <a:pt x="1790563" y="1376570"/>
+                  </a:lnTo>
+                  <a:lnTo>
+                    <a:pt x="1718940" y="1337847"/>
+                  </a:lnTo>
+                  <a:lnTo>
+                    <a:pt x="1647318" y="1298037"/>
+                  </a:lnTo>
+                  <a:lnTo>
+                    <a:pt x="1575695" y="1257110"/>
+                  </a:lnTo>
+                  <a:lnTo>
+                    <a:pt x="1504073" y="1215034"/>
+                  </a:lnTo>
+                  <a:lnTo>
+                    <a:pt x="1432450" y="1171777"/>
+                  </a:lnTo>
+                  <a:lnTo>
+                    <a:pt x="1360827" y="1127305"/>
+                  </a:lnTo>
+                  <a:lnTo>
+                    <a:pt x="1289205" y="1081586"/>
+                  </a:lnTo>
+                  <a:lnTo>
+                    <a:pt x="1217582" y="1034583"/>
+                  </a:lnTo>
+                  <a:lnTo>
+                    <a:pt x="1145960" y="986260"/>
+                  </a:lnTo>
+                  <a:lnTo>
+                    <a:pt x="1074337" y="936582"/>
+                  </a:lnTo>
+                  <a:lnTo>
+                    <a:pt x="1002715" y="885508"/>
+                  </a:lnTo>
+                  <a:lnTo>
+                    <a:pt x="931092" y="833002"/>
+                  </a:lnTo>
+                  <a:lnTo>
+                    <a:pt x="859470" y="779021"/>
+                  </a:lnTo>
+                  <a:lnTo>
+                    <a:pt x="787847" y="723525"/>
+                  </a:lnTo>
+                  <a:lnTo>
+                    <a:pt x="716225" y="666471"/>
+                  </a:lnTo>
+                  <a:lnTo>
+                    <a:pt x="644602" y="607816"/>
+                  </a:lnTo>
+                  <a:lnTo>
+                    <a:pt x="572980" y="547514"/>
+                  </a:lnTo>
+                  <a:lnTo>
+                    <a:pt x="501357" y="485519"/>
+                  </a:lnTo>
+                  <a:lnTo>
+                    <a:pt x="429735" y="421785"/>
+                  </a:lnTo>
+                  <a:lnTo>
+                    <a:pt x="358112" y="356261"/>
+                  </a:lnTo>
+                  <a:lnTo>
+                    <a:pt x="286490" y="288898"/>
+                  </a:lnTo>
+                  <a:lnTo>
+                    <a:pt x="214867" y="219644"/>
+                  </a:lnTo>
+                  <a:lnTo>
+                    <a:pt x="143245" y="148447"/>
+                  </a:lnTo>
+                  <a:lnTo>
+                    <a:pt x="71622" y="75250"/>
                   </a:lnTo>
                   <a:lnTo>
                     <a:pt x="0" y="0"/>
@@ -4100,243 +4100,240 @@
           </p:nvSpPr>
           <p:spPr>
             <a:xfrm>
-              <a:off x="2870759" y="2073503"/>
-              <a:ext cx="5391920" cy="3470746"/>
+              <a:off x="2907580" y="2073503"/>
+              <a:ext cx="5355098" cy="3470908"/>
             </a:xfrm>
             <a:custGeom>
               <a:avLst/>
               <a:pathLst>
-                <a:path w="5391920" h="3470746">
+                <a:path w="5355098" h="3470908">
                   <a:moveTo>
                     <a:pt x="0" y="0"/>
                   </a:moveTo>
                   <a:lnTo>
-                    <a:pt x="20230" y="74236"/>
-                  </a:lnTo>
-                  <a:lnTo>
-                    <a:pt x="91853" y="318247"/>
-                  </a:lnTo>
-                  <a:lnTo>
-                    <a:pt x="163475" y="544794"/>
-                  </a:lnTo>
-                  <a:lnTo>
-                    <a:pt x="235098" y="755128"/>
-                  </a:lnTo>
-                  <a:lnTo>
-                    <a:pt x="306720" y="950409"/>
-                  </a:lnTo>
-                  <a:lnTo>
-                    <a:pt x="378343" y="1131714"/>
-                  </a:lnTo>
-                  <a:lnTo>
-                    <a:pt x="449965" y="1300043"/>
-                  </a:lnTo>
-                  <a:lnTo>
-                    <a:pt x="521588" y="1456325"/>
-                  </a:lnTo>
-                  <a:lnTo>
-                    <a:pt x="593210" y="1601423"/>
-                  </a:lnTo>
-                  <a:lnTo>
-                    <a:pt x="664833" y="1736136"/>
-                  </a:lnTo>
-                  <a:lnTo>
-                    <a:pt x="736455" y="1861209"/>
-                  </a:lnTo>
-                  <a:lnTo>
-                    <a:pt x="808078" y="1977330"/>
-                  </a:lnTo>
-                  <a:lnTo>
-                    <a:pt x="879701" y="2085140"/>
-                  </a:lnTo>
-                  <a:lnTo>
-                    <a:pt x="951323" y="2185235"/>
-                  </a:lnTo>
-                  <a:lnTo>
-                    <a:pt x="1022946" y="2278167"/>
-                  </a:lnTo>
-                  <a:lnTo>
-                    <a:pt x="1094568" y="2364447"/>
-                  </a:lnTo>
-                  <a:lnTo>
-                    <a:pt x="1166191" y="2444553"/>
-                  </a:lnTo>
-                  <a:lnTo>
-                    <a:pt x="1237813" y="2518925"/>
-                  </a:lnTo>
-                  <a:lnTo>
-                    <a:pt x="1309436" y="2587975"/>
-                  </a:lnTo>
-                  <a:lnTo>
-                    <a:pt x="1381058" y="2652083"/>
-                  </a:lnTo>
-                  <a:lnTo>
-                    <a:pt x="1452681" y="2711603"/>
-                  </a:lnTo>
-                  <a:lnTo>
-                    <a:pt x="1524303" y="2766864"/>
-                  </a:lnTo>
-                  <a:lnTo>
-                    <a:pt x="1595926" y="2818169"/>
-                  </a:lnTo>
-                  <a:lnTo>
-                    <a:pt x="1667548" y="2865803"/>
-                  </a:lnTo>
-                  <a:lnTo>
-                    <a:pt x="1739171" y="2910028"/>
-                  </a:lnTo>
-                  <a:lnTo>
-                    <a:pt x="1810793" y="2951088"/>
-                  </a:lnTo>
-                  <a:lnTo>
-                    <a:pt x="1882416" y="2989209"/>
-                  </a:lnTo>
-                  <a:lnTo>
-                    <a:pt x="1954038" y="3024602"/>
-                  </a:lnTo>
-                  <a:lnTo>
-                    <a:pt x="2025661" y="3057461"/>
-                  </a:lnTo>
-                  <a:lnTo>
-                    <a:pt x="2097283" y="3087970"/>
-                  </a:lnTo>
-                  <a:lnTo>
-                    <a:pt x="2168906" y="3116294"/>
-                  </a:lnTo>
-                  <a:lnTo>
-                    <a:pt x="2240529" y="3142592"/>
-                  </a:lnTo>
-                  <a:lnTo>
-                    <a:pt x="2312151" y="3167008"/>
-                  </a:lnTo>
-                  <a:lnTo>
-                    <a:pt x="2383774" y="3189676"/>
-                  </a:lnTo>
-                  <a:lnTo>
-                    <a:pt x="2455396" y="3210722"/>
-                  </a:lnTo>
-                  <a:lnTo>
-                    <a:pt x="2527019" y="3230262"/>
-                  </a:lnTo>
-                  <a:lnTo>
-                    <a:pt x="2598641" y="3248403"/>
-                  </a:lnTo>
-                  <a:lnTo>
-                    <a:pt x="2670264" y="3265246"/>
-                  </a:lnTo>
-                  <a:lnTo>
-                    <a:pt x="2741886" y="3280883"/>
-                  </a:lnTo>
-                  <a:lnTo>
-                    <a:pt x="2813509" y="3295402"/>
-                  </a:lnTo>
-                  <a:lnTo>
-                    <a:pt x="2885131" y="3308881"/>
-                  </a:lnTo>
-                  <a:lnTo>
-                    <a:pt x="2956754" y="3321396"/>
-                  </a:lnTo>
-                  <a:lnTo>
-                    <a:pt x="3028376" y="3333015"/>
-                  </a:lnTo>
-                  <a:lnTo>
-                    <a:pt x="3099999" y="3343802"/>
-                  </a:lnTo>
-                  <a:lnTo>
-                    <a:pt x="3171621" y="3353818"/>
-                  </a:lnTo>
-                  <a:lnTo>
-                    <a:pt x="3243244" y="3363117"/>
-                  </a:lnTo>
-                  <a:lnTo>
-                    <a:pt x="3314866" y="3371750"/>
-                  </a:lnTo>
-                  <a:lnTo>
-                    <a:pt x="3386489" y="3379765"/>
-                  </a:lnTo>
-                  <a:lnTo>
-                    <a:pt x="3458111" y="3387207"/>
-                  </a:lnTo>
-                  <a:lnTo>
-                    <a:pt x="3529734" y="3394116"/>
-                  </a:lnTo>
-                  <a:lnTo>
-                    <a:pt x="3601357" y="3400531"/>
-                  </a:lnTo>
-                  <a:lnTo>
-                    <a:pt x="3672979" y="3406486"/>
-                  </a:lnTo>
-                  <a:lnTo>
-                    <a:pt x="3744602" y="3412015"/>
-                  </a:lnTo>
-                  <a:lnTo>
-                    <a:pt x="3816224" y="3417149"/>
-                  </a:lnTo>
-                  <a:lnTo>
-                    <a:pt x="3887847" y="3421915"/>
-                  </a:lnTo>
-                  <a:lnTo>
-                    <a:pt x="3959469" y="3426340"/>
-                  </a:lnTo>
-                  <a:lnTo>
-                    <a:pt x="4031092" y="3430449"/>
-                  </a:lnTo>
-                  <a:lnTo>
-                    <a:pt x="4102714" y="3434263"/>
-                  </a:lnTo>
-                  <a:lnTo>
-                    <a:pt x="4174337" y="3437805"/>
-                  </a:lnTo>
-                  <a:lnTo>
-                    <a:pt x="4245959" y="3441092"/>
-                  </a:lnTo>
-                  <a:lnTo>
-                    <a:pt x="4317582" y="3444145"/>
-                  </a:lnTo>
-                  <a:lnTo>
-                    <a:pt x="4389204" y="3446979"/>
-                  </a:lnTo>
-                  <a:lnTo>
-                    <a:pt x="4460827" y="3449611"/>
-                  </a:lnTo>
-                  <a:lnTo>
-                    <a:pt x="4532449" y="3452054"/>
-                  </a:lnTo>
-                  <a:lnTo>
-                    <a:pt x="4604072" y="3454322"/>
-                  </a:lnTo>
-                  <a:lnTo>
-                    <a:pt x="4675694" y="3456428"/>
-                  </a:lnTo>
-                  <a:lnTo>
-                    <a:pt x="4747317" y="3458383"/>
-                  </a:lnTo>
-                  <a:lnTo>
-                    <a:pt x="4818939" y="3460198"/>
-                  </a:lnTo>
-                  <a:lnTo>
-                    <a:pt x="4890562" y="3461883"/>
-                  </a:lnTo>
-                  <a:lnTo>
-                    <a:pt x="4962185" y="3463448"/>
-                  </a:lnTo>
-                  <a:lnTo>
-                    <a:pt x="5033807" y="3464901"/>
-                  </a:lnTo>
-                  <a:lnTo>
-                    <a:pt x="5105430" y="3466249"/>
-                  </a:lnTo>
-                  <a:lnTo>
-                    <a:pt x="5177052" y="3467502"/>
-                  </a:lnTo>
-                  <a:lnTo>
-                    <a:pt x="5248675" y="3468664"/>
-                  </a:lnTo>
-                  <a:lnTo>
-                    <a:pt x="5320297" y="3469744"/>
-                  </a:lnTo>
-                  <a:lnTo>
-                    <a:pt x="5391920" y="3470746"/>
+                    <a:pt x="55031" y="196543"/>
+                  </a:lnTo>
+                  <a:lnTo>
+                    <a:pt x="126654" y="433872"/>
+                  </a:lnTo>
+                  <a:lnTo>
+                    <a:pt x="198276" y="654067"/>
+                  </a:lnTo>
+                  <a:lnTo>
+                    <a:pt x="269899" y="858364"/>
+                  </a:lnTo>
+                  <a:lnTo>
+                    <a:pt x="341521" y="1047911"/>
+                  </a:lnTo>
+                  <a:lnTo>
+                    <a:pt x="413144" y="1223773"/>
+                  </a:lnTo>
+                  <a:lnTo>
+                    <a:pt x="484766" y="1386939"/>
+                  </a:lnTo>
+                  <a:lnTo>
+                    <a:pt x="556389" y="1538324"/>
+                  </a:lnTo>
+                  <a:lnTo>
+                    <a:pt x="628011" y="1678779"/>
+                  </a:lnTo>
+                  <a:lnTo>
+                    <a:pt x="699634" y="1809094"/>
+                  </a:lnTo>
+                  <a:lnTo>
+                    <a:pt x="771256" y="1930001"/>
+                  </a:lnTo>
+                  <a:lnTo>
+                    <a:pt x="842879" y="2042178"/>
+                  </a:lnTo>
+                  <a:lnTo>
+                    <a:pt x="914501" y="2146256"/>
+                  </a:lnTo>
+                  <a:lnTo>
+                    <a:pt x="986124" y="2242820"/>
+                  </a:lnTo>
+                  <a:lnTo>
+                    <a:pt x="1057746" y="2332413"/>
+                  </a:lnTo>
+                  <a:lnTo>
+                    <a:pt x="1129369" y="2415537"/>
+                  </a:lnTo>
+                  <a:lnTo>
+                    <a:pt x="1200991" y="2492659"/>
+                  </a:lnTo>
+                  <a:lnTo>
+                    <a:pt x="1272614" y="2564214"/>
+                  </a:lnTo>
+                  <a:lnTo>
+                    <a:pt x="1344237" y="2630602"/>
+                  </a:lnTo>
+                  <a:lnTo>
+                    <a:pt x="1415859" y="2692197"/>
+                  </a:lnTo>
+                  <a:lnTo>
+                    <a:pt x="1487482" y="2749345"/>
+                  </a:lnTo>
+                  <a:lnTo>
+                    <a:pt x="1559104" y="2802368"/>
+                  </a:lnTo>
+                  <a:lnTo>
+                    <a:pt x="1630727" y="2851562"/>
+                  </a:lnTo>
+                  <a:lnTo>
+                    <a:pt x="1702349" y="2897204"/>
+                  </a:lnTo>
+                  <a:lnTo>
+                    <a:pt x="1773972" y="2939551"/>
+                  </a:lnTo>
+                  <a:lnTo>
+                    <a:pt x="1845594" y="2978841"/>
+                  </a:lnTo>
+                  <a:lnTo>
+                    <a:pt x="1917217" y="3015294"/>
+                  </a:lnTo>
+                  <a:lnTo>
+                    <a:pt x="1988839" y="3049116"/>
+                  </a:lnTo>
+                  <a:lnTo>
+                    <a:pt x="2060462" y="3080495"/>
+                  </a:lnTo>
+                  <a:lnTo>
+                    <a:pt x="2132084" y="3109609"/>
+                  </a:lnTo>
+                  <a:lnTo>
+                    <a:pt x="2203707" y="3136621"/>
+                  </a:lnTo>
+                  <a:lnTo>
+                    <a:pt x="2275329" y="3161683"/>
+                  </a:lnTo>
+                  <a:lnTo>
+                    <a:pt x="2346952" y="3184935"/>
+                  </a:lnTo>
+                  <a:lnTo>
+                    <a:pt x="2418574" y="3206509"/>
+                  </a:lnTo>
+                  <a:lnTo>
+                    <a:pt x="2490197" y="3226525"/>
+                  </a:lnTo>
+                  <a:lnTo>
+                    <a:pt x="2561819" y="3245095"/>
+                  </a:lnTo>
+                  <a:lnTo>
+                    <a:pt x="2633442" y="3262326"/>
+                  </a:lnTo>
+                  <a:lnTo>
+                    <a:pt x="2705065" y="3278312"/>
+                  </a:lnTo>
+                  <a:lnTo>
+                    <a:pt x="2776687" y="3293144"/>
+                  </a:lnTo>
+                  <a:lnTo>
+                    <a:pt x="2848310" y="3306905"/>
+                  </a:lnTo>
+                  <a:lnTo>
+                    <a:pt x="2919932" y="3319672"/>
+                  </a:lnTo>
+                  <a:lnTo>
+                    <a:pt x="2991555" y="3331518"/>
+                  </a:lnTo>
+                  <a:lnTo>
+                    <a:pt x="3063177" y="3342509"/>
+                  </a:lnTo>
+                  <a:lnTo>
+                    <a:pt x="3134800" y="3352706"/>
+                  </a:lnTo>
+                  <a:lnTo>
+                    <a:pt x="3206422" y="3362167"/>
+                  </a:lnTo>
+                  <a:lnTo>
+                    <a:pt x="3278045" y="3370944"/>
+                  </a:lnTo>
+                  <a:lnTo>
+                    <a:pt x="3349667" y="3379089"/>
+                  </a:lnTo>
+                  <a:lnTo>
+                    <a:pt x="3421290" y="3386645"/>
+                  </a:lnTo>
+                  <a:lnTo>
+                    <a:pt x="3492912" y="3393655"/>
+                  </a:lnTo>
+                  <a:lnTo>
+                    <a:pt x="3564535" y="3400160"/>
+                  </a:lnTo>
+                  <a:lnTo>
+                    <a:pt x="3636157" y="3406194"/>
+                  </a:lnTo>
+                  <a:lnTo>
+                    <a:pt x="3707780" y="3411793"/>
+                  </a:lnTo>
+                  <a:lnTo>
+                    <a:pt x="3779402" y="3416988"/>
+                  </a:lnTo>
+                  <a:lnTo>
+                    <a:pt x="3851025" y="3421808"/>
+                  </a:lnTo>
+                  <a:lnTo>
+                    <a:pt x="3922647" y="3426280"/>
+                  </a:lnTo>
+                  <a:lnTo>
+                    <a:pt x="3994270" y="3430429"/>
+                  </a:lnTo>
+                  <a:lnTo>
+                    <a:pt x="4065893" y="3434278"/>
+                  </a:lnTo>
+                  <a:lnTo>
+                    <a:pt x="4137515" y="3437850"/>
+                  </a:lnTo>
+                  <a:lnTo>
+                    <a:pt x="4209138" y="3441163"/>
+                  </a:lnTo>
+                  <a:lnTo>
+                    <a:pt x="4280760" y="3444238"/>
+                  </a:lnTo>
+                  <a:lnTo>
+                    <a:pt x="4352383" y="3447090"/>
+                  </a:lnTo>
+                  <a:lnTo>
+                    <a:pt x="4424005" y="3449737"/>
+                  </a:lnTo>
+                  <a:lnTo>
+                    <a:pt x="4495628" y="3452192"/>
+                  </a:lnTo>
+                  <a:lnTo>
+                    <a:pt x="4567250" y="3454470"/>
+                  </a:lnTo>
+                  <a:lnTo>
+                    <a:pt x="4638873" y="3456584"/>
+                  </a:lnTo>
+                  <a:lnTo>
+                    <a:pt x="4710495" y="3458545"/>
+                  </a:lnTo>
+                  <a:lnTo>
+                    <a:pt x="4782118" y="3460365"/>
+                  </a:lnTo>
+                  <a:lnTo>
+                    <a:pt x="4853740" y="3462053"/>
+                  </a:lnTo>
+                  <a:lnTo>
+                    <a:pt x="4925363" y="3463619"/>
+                  </a:lnTo>
+                  <a:lnTo>
+                    <a:pt x="4996985" y="3465072"/>
+                  </a:lnTo>
+                  <a:lnTo>
+                    <a:pt x="5068608" y="3466420"/>
+                  </a:lnTo>
+                  <a:lnTo>
+                    <a:pt x="5140230" y="3467671"/>
+                  </a:lnTo>
+                  <a:lnTo>
+                    <a:pt x="5211853" y="3468832"/>
+                  </a:lnTo>
+                  <a:lnTo>
+                    <a:pt x="5283475" y="3469909"/>
+                  </a:lnTo>
+                  <a:lnTo>
+                    <a:pt x="5355098" y="3470908"/>
                   </a:lnTo>
                 </a:path>
               </a:pathLst>
@@ -4408,7 +4405,7 @@
           </p:nvSpPr>
           <p:spPr>
             <a:xfrm>
-              <a:off x="4254372" y="2073503"/>
+              <a:off x="4278722" y="2073503"/>
               <a:ext cx="0" cy="3649639"/>
             </a:xfrm>
             <a:custGeom>
@@ -4681,7 +4678,7 @@
           </p:nvSpPr>
           <p:spPr>
             <a:xfrm>
-              <a:off x="2254916" y="5785772"/>
+              <a:off x="2255364" y="5785772"/>
               <a:ext cx="161574" cy="80101"/>
             </a:xfrm>
             <a:prstGeom prst="rect">
@@ -4727,7 +4724,7 @@
           </p:nvSpPr>
           <p:spPr>
             <a:xfrm>
-              <a:off x="4120281" y="5785772"/>
+              <a:off x="4120286" y="5785772"/>
               <a:ext cx="62179" cy="80101"/>
             </a:xfrm>
             <a:prstGeom prst="rect">
@@ -4773,7 +4770,7 @@
           </p:nvSpPr>
           <p:spPr>
             <a:xfrm>
-              <a:off x="5904858" y="5785772"/>
+              <a:off x="5904422" y="5785772"/>
               <a:ext cx="124358" cy="80101"/>
             </a:xfrm>
             <a:prstGeom prst="rect">
@@ -4819,7 +4816,7 @@
           </p:nvSpPr>
           <p:spPr>
             <a:xfrm>
-              <a:off x="7720525" y="5785772"/>
+              <a:off x="7719647" y="5785772"/>
               <a:ext cx="124358" cy="80101"/>
             </a:xfrm>
             <a:prstGeom prst="rect">
@@ -4990,7 +4987,7 @@
                   <a:latin typeface="Helvetica"/>
                   <a:cs typeface="Helvetica"/>
                 </a:rPr>
-                <a:t>subHR per 10 % decline: 2.56 (1.43-4.58), p_Bonf = 0.009 (n = 6)  |  per IQR decline (Δ = 26.4 %): 12.05 (2.60-55.92)  |  IQR: [-11.1, 15.3] %</a:t>
+                <a:t>subHR per 10 % decline: 2.58 (1.42-4.70), p_Bonf = 0.011 (n = 6)  |  per IQR decline (Δ = 26.4 %): 12.28 (2.53-59.72)  |  IQR: [-11.1, 15.4] %</a:t>
               </a:r>
             </a:p>
           </p:txBody>
